--- a/Lecture Slides/06 - Dynamic Memory Allocation.pptx
+++ b/Lecture Slides/06 - Dynamic Memory Allocation.pptx
@@ -137,7 +137,7 @@
           <a:p>
             <a:fld id="{6AF2E720-C245-44A9-8308-C689E449D10E}" type="datetimeFigureOut">
               <a:rPr lang="en-US" smtClean="0"/>
-              <a:t>2/3/2026</a:t>
+              <a:t>2/6/2026</a:t>
             </a:fld>
             <a:endParaRPr lang="en-US"/>
           </a:p>
@@ -1235,7 +1235,7 @@
           <a:p>
             <a:r>
               <a:rPr lang="en-US" dirty="0" err="1"/>
-              <a:t>realloation.c</a:t>
+              <a:t>reallocation.c</a:t>
             </a:r>
             <a:endParaRPr lang="en-US" dirty="0"/>
           </a:p>
@@ -2190,6 +2190,21 @@
           <a:p>
             <a:endParaRPr lang="en-US" dirty="0"/>
           </a:p>
+          <a:p>
+            <a:r>
+              <a:rPr lang="en-US" dirty="0"/>
+              <a:t>MacOS: top –o mem</a:t>
+            </a:r>
+          </a:p>
+          <a:p>
+            <a:r>
+              <a:rPr lang="en-US" dirty="0"/>
+              <a:t>Linux: top –o RES</a:t>
+            </a:r>
+          </a:p>
+          <a:p>
+            <a:endParaRPr lang="en-US" dirty="0"/>
+          </a:p>
         </p:txBody>
       </p:sp>
       <p:sp>
@@ -2524,6 +2539,10 @@
             <a:endParaRPr lang="en-US" dirty="0"/>
           </a:p>
           <a:p>
+            <a:pPr marL="228600" indent="-228600">
+              <a:buFont typeface="+mj-lt"/>
+              <a:buAutoNum type="arabicPeriod"/>
+            </a:pPr>
             <a:r>
               <a:rPr lang="en-US" dirty="0"/>
               <a:t>Uses system calls like </a:t>
@@ -2560,15 +2579,134 @@
             </a:r>
           </a:p>
           <a:p>
+            <a:pPr marL="228600" indent="-228600">
+              <a:buFont typeface="+mj-lt"/>
+              <a:buAutoNum type="arabicPeriod"/>
+            </a:pPr>
             <a:r>
               <a:rPr lang="en-US" dirty="0"/>
               <a:t>Manages memory via metadata (often using linked lists) to track free and allocated blocks.</a:t>
             </a:r>
           </a:p>
           <a:p>
+            <a:pPr marL="228600" indent="-228600">
+              <a:buFont typeface="+mj-lt"/>
+              <a:buAutoNum type="arabicPeriod"/>
+            </a:pPr>
             <a:r>
               <a:rPr lang="en-US" dirty="0"/>
               <a:t>Efficiently splits large blocks or combines (coalesces) adjacent free blocks.</a:t>
+            </a:r>
+          </a:p>
+          <a:p>
+            <a:endParaRPr lang="en-US" dirty="0"/>
+          </a:p>
+          <a:p>
+            <a:r>
+              <a:rPr lang="en-US" b="1" u="sng" dirty="0"/>
+              <a:t>For reference:</a:t>
+            </a:r>
+          </a:p>
+          <a:p>
+            <a:endParaRPr lang="en-US" dirty="0"/>
+          </a:p>
+          <a:p>
+            <a:r>
+              <a:rPr lang="en-US" b="1" dirty="0" err="1"/>
+              <a:t>sbrk</a:t>
+            </a:r>
+            <a:r>
+              <a:rPr lang="en-US" b="1" dirty="0"/>
+              <a:t>: </a:t>
+            </a:r>
+          </a:p>
+          <a:p>
+            <a:r>
+              <a:rPr lang="en-US" dirty="0"/>
+              <a:t>The </a:t>
+            </a:r>
+            <a:r>
+              <a:rPr lang="en-US" sz="1200" b="1" kern="1200" dirty="0" err="1">
+                <a:solidFill>
+                  <a:schemeClr val="tx1"/>
+                </a:solidFill>
+                <a:latin typeface="+mn-lt"/>
+                <a:ea typeface="+mn-ea"/>
+                <a:cs typeface="+mn-cs"/>
+              </a:rPr>
+              <a:t>sbrk</a:t>
+            </a:r>
+            <a:r>
+              <a:rPr lang="en-US" dirty="0"/>
+              <a:t> system call is the traditional way to manage the </a:t>
+            </a:r>
+            <a:r>
+              <a:rPr lang="en-US" b="1" dirty="0"/>
+              <a:t>heap</a:t>
+            </a:r>
+            <a:r>
+              <a:rPr lang="en-US" dirty="0"/>
+              <a:t>. </a:t>
+            </a:r>
+          </a:p>
+          <a:p>
+            <a:r>
+              <a:rPr lang="en-US" dirty="0"/>
+              <a:t>It changes the location of the "program break," </a:t>
+            </a:r>
+          </a:p>
+          <a:p>
+            <a:r>
+              <a:rPr lang="en-US" dirty="0"/>
+              <a:t>which is the address that marks the end of the process's data segment.</a:t>
+            </a:r>
+          </a:p>
+          <a:p>
+            <a:endParaRPr lang="en-US" dirty="0"/>
+          </a:p>
+          <a:p>
+            <a:r>
+              <a:rPr lang="en-US" b="1" dirty="0" err="1"/>
+              <a:t>mmap</a:t>
+            </a:r>
+            <a:r>
+              <a:rPr lang="en-US" b="1" dirty="0"/>
+              <a:t>:</a:t>
+            </a:r>
+          </a:p>
+          <a:p>
+            <a:r>
+              <a:rPr lang="en-US" dirty="0"/>
+              <a:t>The </a:t>
+            </a:r>
+            <a:r>
+              <a:rPr lang="en-US" sz="1200" b="1" kern="1200" dirty="0" err="1">
+                <a:solidFill>
+                  <a:schemeClr val="tx1"/>
+                </a:solidFill>
+                <a:latin typeface="+mn-lt"/>
+                <a:ea typeface="+mn-ea"/>
+                <a:cs typeface="+mn-cs"/>
+              </a:rPr>
+              <a:t>mmap</a:t>
+            </a:r>
+            <a:r>
+              <a:rPr lang="en-US" dirty="0"/>
+              <a:t> system call creates a new </a:t>
+            </a:r>
+            <a:r>
+              <a:rPr lang="en-US" b="1" dirty="0"/>
+              <a:t>mapping</a:t>
+            </a:r>
+            <a:r>
+              <a:rPr lang="en-US" dirty="0"/>
+              <a:t> in the process's virtual address space.</a:t>
+            </a:r>
+          </a:p>
+          <a:p>
+            <a:r>
+              <a:rPr lang="en-US" dirty="0"/>
+              <a:t>It can map files directly into memory or create "anonymous" mappings (blocks of RAM not backed by a file).</a:t>
             </a:r>
           </a:p>
           <a:p>
@@ -3079,6 +3217,222 @@
           <a:p>
             <a:endParaRPr lang="en-US" dirty="0"/>
           </a:p>
+          <a:p>
+            <a:endParaRPr lang="en-US" dirty="0"/>
+          </a:p>
+          <a:p>
+            <a:pPr marL="0" marR="0" lvl="0" indent="0" algn="l" defTabSz="914400" rtl="0" eaLnBrk="1" fontAlgn="auto" latinLnBrk="0" hangingPunct="1">
+              <a:lnSpc>
+                <a:spcPct val="100000"/>
+              </a:lnSpc>
+              <a:spcBef>
+                <a:spcPts val="0"/>
+              </a:spcBef>
+              <a:spcAft>
+                <a:spcPts val="0"/>
+              </a:spcAft>
+              <a:buClrTx/>
+              <a:buSzTx/>
+              <a:buFontTx/>
+              <a:buNone/>
+              <a:tabLst/>
+              <a:defRPr/>
+            </a:pPr>
+            <a:r>
+              <a:rPr lang="en-US" b="1" u="sng" dirty="0"/>
+              <a:t>For reference:</a:t>
+            </a:r>
+          </a:p>
+          <a:p>
+            <a:endParaRPr lang="en-US" dirty="0"/>
+          </a:p>
+          <a:p>
+            <a:r>
+              <a:rPr lang="en-US" b="1" dirty="0"/>
+              <a:t>top:</a:t>
+            </a:r>
+          </a:p>
+          <a:p>
+            <a:r>
+              <a:rPr lang="en-US" sz="1200" kern="1200" dirty="0">
+                <a:solidFill>
+                  <a:schemeClr val="tx1"/>
+                </a:solidFill>
+                <a:latin typeface="+mn-lt"/>
+                <a:ea typeface="+mn-ea"/>
+                <a:cs typeface="+mn-cs"/>
+              </a:rPr>
+              <a:t>MacOS: top -o </a:t>
+            </a:r>
+            <a:r>
+              <a:rPr lang="en-US" sz="1200" kern="1200" dirty="0" err="1">
+                <a:solidFill>
+                  <a:schemeClr val="tx1"/>
+                </a:solidFill>
+                <a:latin typeface="+mn-lt"/>
+                <a:ea typeface="+mn-ea"/>
+                <a:cs typeface="+mn-cs"/>
+              </a:rPr>
+              <a:t>rsize</a:t>
+            </a:r>
+            <a:r>
+              <a:rPr lang="en-US" dirty="0"/>
+              <a:t> </a:t>
+            </a:r>
+          </a:p>
+          <a:p>
+            <a:r>
+              <a:rPr lang="en-US" dirty="0"/>
+              <a:t>Linux: top –o RES</a:t>
+            </a:r>
+          </a:p>
+          <a:p>
+            <a:r>
+              <a:rPr lang="en-US" dirty="0"/>
+              <a:t>Sorts processes by memory percentage (%MEM).</a:t>
+            </a:r>
+          </a:p>
+          <a:p>
+            <a:endParaRPr lang="en-US" dirty="0"/>
+          </a:p>
+          <a:p>
+            <a:r>
+              <a:rPr lang="en-US" b="1" dirty="0" err="1"/>
+              <a:t>vmmap</a:t>
+            </a:r>
+            <a:r>
+              <a:rPr lang="en-US" b="1" dirty="0"/>
+              <a:t>:</a:t>
+            </a:r>
+          </a:p>
+          <a:p>
+            <a:r>
+              <a:rPr lang="en-US" dirty="0"/>
+              <a:t>MacOS: </a:t>
+            </a:r>
+            <a:r>
+              <a:rPr lang="en-US" dirty="0" err="1"/>
+              <a:t>vmmap</a:t>
+            </a:r>
+            <a:endParaRPr lang="en-US" dirty="0"/>
+          </a:p>
+          <a:p>
+            <a:r>
+              <a:rPr lang="en-US" dirty="0"/>
+              <a:t>Linux: </a:t>
+            </a:r>
+            <a:r>
+              <a:rPr lang="en-US" dirty="0" err="1"/>
+              <a:t>pmap</a:t>
+            </a:r>
+            <a:endParaRPr lang="en-US" dirty="0"/>
+          </a:p>
+          <a:p>
+            <a:endParaRPr lang="en-US" dirty="0"/>
+          </a:p>
+          <a:p>
+            <a:r>
+              <a:rPr lang="en-US" b="1" dirty="0"/>
+              <a:t>RSS (Resident Set Size)</a:t>
+            </a:r>
+          </a:p>
+          <a:p>
+            <a:r>
+              <a:rPr lang="en-US" dirty="0"/>
+              <a:t>This is the </a:t>
+            </a:r>
+            <a:r>
+              <a:rPr lang="en-US" b="1" dirty="0"/>
+              <a:t>actual physical RAM</a:t>
+            </a:r>
+            <a:r>
+              <a:rPr lang="en-US" dirty="0"/>
+              <a:t> the process is using at this exact moment.</a:t>
+            </a:r>
+          </a:p>
+          <a:p>
+            <a:endParaRPr lang="en-US" dirty="0"/>
+          </a:p>
+          <a:p>
+            <a:r>
+              <a:rPr lang="en-US" b="1" dirty="0"/>
+              <a:t>VSZ (Virtual Memory Size)</a:t>
+            </a:r>
+          </a:p>
+          <a:p>
+            <a:r>
+              <a:rPr lang="en-US" dirty="0"/>
+              <a:t>This is the </a:t>
+            </a:r>
+            <a:r>
+              <a:rPr lang="en-US" b="1" dirty="0"/>
+              <a:t>total address space</a:t>
+            </a:r>
+            <a:r>
+              <a:rPr lang="en-US" dirty="0"/>
+              <a:t> the process has access to.</a:t>
+            </a:r>
+          </a:p>
+          <a:p>
+            <a:endParaRPr lang="en-US" dirty="0"/>
+          </a:p>
+          <a:p>
+            <a:r>
+              <a:rPr lang="en-US" b="1" dirty="0"/>
+              <a:t>grep: </a:t>
+            </a:r>
+            <a:r>
+              <a:rPr lang="en-US" b="0" dirty="0"/>
+              <a:t>(</a:t>
+            </a:r>
+            <a:r>
+              <a:rPr lang="en-US" b="1" dirty="0"/>
+              <a:t>G</a:t>
+            </a:r>
+            <a:r>
+              <a:rPr lang="en-US" dirty="0"/>
+              <a:t>lobal </a:t>
+            </a:r>
+            <a:r>
+              <a:rPr lang="en-US" b="1" dirty="0"/>
+              <a:t>R</a:t>
+            </a:r>
+            <a:r>
+              <a:rPr lang="en-US" dirty="0"/>
+              <a:t>egular </a:t>
+            </a:r>
+            <a:r>
+              <a:rPr lang="en-US" b="1" dirty="0"/>
+              <a:t>E</a:t>
+            </a:r>
+            <a:r>
+              <a:rPr lang="en-US" dirty="0"/>
+              <a:t>xpression </a:t>
+            </a:r>
+            <a:r>
+              <a:rPr lang="en-US" b="1" dirty="0"/>
+              <a:t>P</a:t>
+            </a:r>
+            <a:r>
+              <a:rPr lang="en-US" dirty="0"/>
+              <a:t>rint.)</a:t>
+            </a:r>
+          </a:p>
+          <a:p>
+            <a:r>
+              <a:rPr lang="en-US" dirty="0"/>
+              <a:t>It searches through files (or input piped from other commands) </a:t>
+            </a:r>
+          </a:p>
+          <a:p>
+            <a:r>
+              <a:rPr lang="en-US" dirty="0"/>
+              <a:t>for lines that match a specific pattern and prints those lines to your terminal.</a:t>
+            </a:r>
+          </a:p>
+          <a:p>
+            <a:endParaRPr lang="en-US" dirty="0"/>
+          </a:p>
         </p:txBody>
       </p:sp>
       <p:sp>
@@ -3435,10 +3789,36 @@
           </a:p>
           <a:p>
             <a:r>
-              <a:rPr lang="en-US" dirty="0" err="1"/>
-              <a:t>malloc_demo.c</a:t>
-            </a:r>
-            <a:endParaRPr lang="en-US" dirty="0"/>
+              <a:rPr lang="en-US" dirty="0"/>
+              <a:t>malloc_demo_1.c</a:t>
+            </a:r>
+          </a:p>
+          <a:p>
+            <a:pPr marL="0" marR="0" lvl="0" indent="0" algn="l" defTabSz="914400" rtl="0" eaLnBrk="1" fontAlgn="auto" latinLnBrk="0" hangingPunct="1">
+              <a:lnSpc>
+                <a:spcPct val="100000"/>
+              </a:lnSpc>
+              <a:spcBef>
+                <a:spcPts val="0"/>
+              </a:spcBef>
+              <a:spcAft>
+                <a:spcPts val="0"/>
+              </a:spcAft>
+              <a:buClrTx/>
+              <a:buSzTx/>
+              <a:buFontTx/>
+              <a:buNone/>
+              <a:tabLst/>
+              <a:defRPr/>
+            </a:pPr>
+            <a:r>
+              <a:rPr lang="en-US" dirty="0"/>
+              <a:t>malloc_demo_2.c </a:t>
+            </a:r>
+            <a:r>
+              <a:rPr lang="en-US" i="1" dirty="0"/>
+              <a:t>(optional)</a:t>
+            </a:r>
           </a:p>
           <a:p>
             <a:endParaRPr lang="en-US" dirty="0"/>
@@ -4529,7 +4909,7 @@
           <a:p>
             <a:fld id="{1D8BD707-D9CF-40AE-B4C6-C98DA3205C09}" type="datetimeFigureOut">
               <a:rPr lang="en-US"/>
-              <a:t>2/3/2026</a:t>
+              <a:t>2/6/2026</a:t>
             </a:fld>
             <a:endParaRPr lang="en-US"/>
           </a:p>
@@ -4706,7 +5086,7 @@
           <a:p>
             <a:fld id="{1D8BD707-D9CF-40AE-B4C6-C98DA3205C09}" type="datetimeFigureOut">
               <a:rPr lang="en-US"/>
-              <a:t>2/3/2026</a:t>
+              <a:t>2/6/2026</a:t>
             </a:fld>
             <a:endParaRPr lang="en-US"/>
           </a:p>
@@ -4920,7 +5300,7 @@
           <a:p>
             <a:fld id="{1D8BD707-D9CF-40AE-B4C6-C98DA3205C09}" type="datetimeFigureOut">
               <a:rPr lang="en-US"/>
-              <a:t>2/3/2026</a:t>
+              <a:t>2/6/2026</a:t>
             </a:fld>
             <a:endParaRPr lang="en-US"/>
           </a:p>
@@ -5068,7 +5448,7 @@
           <a:p>
             <a:fld id="{1D8BD707-D9CF-40AE-B4C6-C98DA3205C09}" type="datetimeFigureOut">
               <a:rPr lang="en-US"/>
-              <a:t>2/3/2026</a:t>
+              <a:t>2/6/2026</a:t>
             </a:fld>
             <a:endParaRPr lang="en-US"/>
           </a:p>
@@ -5187,7 +5567,7 @@
           <a:p>
             <a:fld id="{1D8BD707-D9CF-40AE-B4C6-C98DA3205C09}" type="datetimeFigureOut">
               <a:rPr lang="en-US"/>
-              <a:t>2/3/2026</a:t>
+              <a:t>2/6/2026</a:t>
             </a:fld>
             <a:endParaRPr lang="en-US"/>
           </a:p>
@@ -5434,7 +5814,7 @@
           <a:p>
             <a:fld id="{1D8BD707-D9CF-40AE-B4C6-C98DA3205C09}" type="datetimeFigureOut">
               <a:rPr lang="en-US"/>
-              <a:t>2/3/2026</a:t>
+              <a:t>2/6/2026</a:t>
             </a:fld>
             <a:endParaRPr lang="en-US"/>
           </a:p>
@@ -17219,7 +17599,7 @@
               </a:rPr>
               <a:t> memleak</a:t>
             </a:r>
-            <a:endParaRPr sz="1800">
+            <a:endParaRPr sz="1800" dirty="0">
               <a:latin typeface="Arial MT"/>
               <a:cs typeface="Arial MT"/>
             </a:endParaRPr>
@@ -20423,8 +20803,8 @@
         </p:nvSpPr>
         <p:spPr>
           <a:xfrm>
-            <a:off x="559725" y="2566808"/>
-            <a:ext cx="4240875" cy="3593291"/>
+            <a:off x="410375" y="2566808"/>
+            <a:ext cx="4390225" cy="3956917"/>
           </a:xfrm>
           <a:prstGeom prst="rect">
             <a:avLst/>
@@ -20445,7 +20825,7 @@
               </a:spcBef>
             </a:pPr>
             <a:r>
-              <a:rPr sz="1800" dirty="0">
+              <a:rPr sz="2000" dirty="0">
                 <a:solidFill>
                   <a:srgbClr val="980000"/>
                 </a:solidFill>
@@ -20455,7 +20835,7 @@
               <a:t>Key</a:t>
             </a:r>
             <a:r>
-              <a:rPr sz="1800" spc="-30" dirty="0">
+              <a:rPr sz="2000" spc="-30" dirty="0">
                 <a:solidFill>
                   <a:srgbClr val="980000"/>
                 </a:solidFill>
@@ -20465,7 +20845,7 @@
               <a:t> </a:t>
             </a:r>
             <a:r>
-              <a:rPr sz="1800" dirty="0">
+              <a:rPr sz="2000" dirty="0">
                 <a:solidFill>
                   <a:srgbClr val="980000"/>
                 </a:solidFill>
@@ -20475,7 +20855,7 @@
               <a:t>difference</a:t>
             </a:r>
             <a:r>
-              <a:rPr sz="1800" spc="-25" dirty="0">
+              <a:rPr sz="2000" spc="-25" dirty="0">
                 <a:solidFill>
                   <a:srgbClr val="980000"/>
                 </a:solidFill>
@@ -20485,7 +20865,7 @@
               <a:t> </a:t>
             </a:r>
             <a:r>
-              <a:rPr sz="1800" dirty="0">
+              <a:rPr sz="2000" dirty="0">
                 <a:solidFill>
                   <a:srgbClr val="980000"/>
                 </a:solidFill>
@@ -20495,7 +20875,7 @@
               <a:t>from</a:t>
             </a:r>
             <a:r>
-              <a:rPr sz="1800" spc="-20" dirty="0">
+              <a:rPr sz="2000" spc="-20" dirty="0">
                 <a:solidFill>
                   <a:srgbClr val="980000"/>
                 </a:solidFill>
@@ -20505,7 +20885,7 @@
               <a:t> </a:t>
             </a:r>
             <a:r>
-              <a:rPr sz="1800" b="1" dirty="0">
+              <a:rPr sz="2000" b="1" dirty="0">
                 <a:solidFill>
                   <a:srgbClr val="980000"/>
                 </a:solidFill>
@@ -20515,7 +20895,7 @@
               <a:t>true</a:t>
             </a:r>
             <a:r>
-              <a:rPr sz="1800" b="1" spc="-25" dirty="0">
+              <a:rPr sz="2000" b="1" spc="-25" dirty="0">
                 <a:solidFill>
                   <a:srgbClr val="980000"/>
                 </a:solidFill>
@@ -20525,7 +20905,7 @@
               <a:t> </a:t>
             </a:r>
             <a:r>
-              <a:rPr sz="1800" b="1" spc="-10" dirty="0">
+              <a:rPr sz="2000" b="1" spc="-10" dirty="0">
                 <a:solidFill>
                   <a:srgbClr val="980000"/>
                 </a:solidFill>
@@ -20535,7 +20915,7 @@
               <a:t>static </a:t>
             </a:r>
             <a:r>
-              <a:rPr sz="1800" b="1" dirty="0">
+              <a:rPr sz="2000" b="1" dirty="0">
                 <a:solidFill>
                   <a:srgbClr val="980000"/>
                 </a:solidFill>
@@ -20545,7 +20925,7 @@
               <a:t>allocation</a:t>
             </a:r>
             <a:r>
-              <a:rPr sz="1800" b="1" spc="-15" dirty="0">
+              <a:rPr sz="2000" b="1" spc="-15" dirty="0">
                 <a:solidFill>
                   <a:srgbClr val="980000"/>
                 </a:solidFill>
@@ -20555,7 +20935,7 @@
               <a:t> </a:t>
             </a:r>
             <a:r>
-              <a:rPr sz="1800" dirty="0">
+              <a:rPr sz="2000" dirty="0">
                 <a:solidFill>
                   <a:srgbClr val="980000"/>
                 </a:solidFill>
@@ -20565,7 +20945,7 @@
               <a:t>(like</a:t>
             </a:r>
             <a:r>
-              <a:rPr sz="1800" spc="-20" dirty="0">
+              <a:rPr sz="2000" spc="-20" dirty="0">
                 <a:solidFill>
                   <a:srgbClr val="980000"/>
                 </a:solidFill>
@@ -20575,7 +20955,7 @@
               <a:t> </a:t>
             </a:r>
             <a:r>
-              <a:rPr sz="1800" b="1" dirty="0">
+              <a:rPr sz="2000" b="1" dirty="0">
                 <a:solidFill>
                   <a:srgbClr val="980000"/>
                 </a:solidFill>
@@ -20585,7 +20965,7 @@
               <a:t>int</a:t>
             </a:r>
             <a:r>
-              <a:rPr sz="1800" b="1" spc="-50" dirty="0">
+              <a:rPr sz="2000" b="1" spc="-50" dirty="0">
                 <a:solidFill>
                   <a:srgbClr val="980000"/>
                 </a:solidFill>
@@ -20595,7 +20975,7 @@
               <a:t> </a:t>
             </a:r>
             <a:r>
-              <a:rPr sz="1800" b="1" dirty="0">
+              <a:rPr sz="2000" b="1" dirty="0">
                 <a:solidFill>
                   <a:srgbClr val="980000"/>
                 </a:solidFill>
@@ -20605,7 +20985,7 @@
               <a:t>arr[5];</a:t>
             </a:r>
             <a:r>
-              <a:rPr sz="1800" dirty="0">
+              <a:rPr sz="2000" dirty="0">
                 <a:solidFill>
                   <a:srgbClr val="980000"/>
                 </a:solidFill>
@@ -20615,7 +20995,7 @@
               <a:t>)</a:t>
             </a:r>
             <a:r>
-              <a:rPr sz="1800" spc="-30" dirty="0">
+              <a:rPr sz="2000" spc="-30" dirty="0">
                 <a:solidFill>
                   <a:srgbClr val="980000"/>
                 </a:solidFill>
@@ -20625,7 +21005,7 @@
               <a:t> </a:t>
             </a:r>
             <a:r>
-              <a:rPr sz="1800" spc="-25" dirty="0">
+              <a:rPr sz="2000" spc="-25" dirty="0">
                 <a:solidFill>
                   <a:srgbClr val="980000"/>
                 </a:solidFill>
@@ -20634,7 +21014,7 @@
               </a:rPr>
               <a:t>is:</a:t>
             </a:r>
-            <a:endParaRPr sz="1800" dirty="0">
+            <a:endParaRPr sz="2000" dirty="0">
               <a:latin typeface="Arial MT"/>
               <a:cs typeface="Arial MT"/>
             </a:endParaRPr>
@@ -20656,7 +21036,7 @@
               </a:tabLst>
             </a:pPr>
             <a:r>
-              <a:rPr sz="1800" dirty="0">
+              <a:rPr sz="2000" dirty="0">
                 <a:solidFill>
                   <a:srgbClr val="980000"/>
                 </a:solidFill>
@@ -20666,7 +21046,7 @@
               <a:t>Memory</a:t>
             </a:r>
             <a:r>
-              <a:rPr sz="1800" spc="5" dirty="0">
+              <a:rPr sz="2000" spc="5" dirty="0">
                 <a:solidFill>
                   <a:srgbClr val="980000"/>
                 </a:solidFill>
@@ -20676,7 +21056,7 @@
               <a:t> </a:t>
             </a:r>
             <a:r>
-              <a:rPr sz="1800" dirty="0">
+              <a:rPr sz="2000" dirty="0">
                 <a:solidFill>
                   <a:srgbClr val="980000"/>
                 </a:solidFill>
@@ -20686,7 +21066,7 @@
               <a:t>from</a:t>
             </a:r>
             <a:r>
-              <a:rPr sz="1800" spc="10" dirty="0">
+              <a:rPr sz="2000" spc="10" dirty="0">
                 <a:solidFill>
                   <a:srgbClr val="980000"/>
                 </a:solidFill>
@@ -20696,7 +21076,7 @@
               <a:t> </a:t>
             </a:r>
             <a:r>
-              <a:rPr sz="1800" spc="-10" dirty="0">
+              <a:rPr sz="2000" spc="-10" dirty="0">
                 <a:solidFill>
                   <a:srgbClr val="980000"/>
                 </a:solidFill>
@@ -20706,7 +21086,7 @@
               <a:t>malloc</a:t>
             </a:r>
             <a:r>
-              <a:rPr sz="1800" spc="-570" dirty="0">
+              <a:rPr sz="2000" spc="-570" dirty="0">
                 <a:solidFill>
                   <a:srgbClr val="980000"/>
                 </a:solidFill>
@@ -20716,7 +21096,7 @@
               <a:t> </a:t>
             </a:r>
             <a:r>
-              <a:rPr sz="1800" spc="-25" dirty="0">
+              <a:rPr sz="2000" spc="-25" dirty="0">
                 <a:solidFill>
                   <a:srgbClr val="980000"/>
                 </a:solidFill>
@@ -20726,7 +21106,7 @@
               <a:t>is </a:t>
             </a:r>
             <a:r>
-              <a:rPr sz="1800" dirty="0">
+              <a:rPr sz="2000" dirty="0">
                 <a:solidFill>
                   <a:srgbClr val="980000"/>
                 </a:solidFill>
@@ -20736,7 +21116,7 @@
               <a:t>allocated</a:t>
             </a:r>
             <a:r>
-              <a:rPr sz="1800" spc="-25" dirty="0">
+              <a:rPr sz="2000" spc="-25" dirty="0">
                 <a:solidFill>
                   <a:srgbClr val="980000"/>
                 </a:solidFill>
@@ -20746,7 +21126,7 @@
               <a:t> </a:t>
             </a:r>
             <a:r>
-              <a:rPr sz="1800" dirty="0">
+              <a:rPr sz="2000" dirty="0">
                 <a:solidFill>
                   <a:srgbClr val="980000"/>
                 </a:solidFill>
@@ -20756,7 +21136,7 @@
               <a:t>on</a:t>
             </a:r>
             <a:r>
-              <a:rPr sz="1800" spc="-20" dirty="0">
+              <a:rPr sz="2000" spc="-20" dirty="0">
                 <a:solidFill>
                   <a:srgbClr val="980000"/>
                 </a:solidFill>
@@ -20766,7 +21146,7 @@
               <a:t> </a:t>
             </a:r>
             <a:r>
-              <a:rPr sz="1800" dirty="0">
+              <a:rPr sz="2000" dirty="0">
                 <a:solidFill>
                   <a:srgbClr val="980000"/>
                 </a:solidFill>
@@ -20776,7 +21156,7 @@
               <a:t>the</a:t>
             </a:r>
             <a:r>
-              <a:rPr sz="1800" spc="-10" dirty="0">
+              <a:rPr sz="2000" spc="-10" dirty="0">
                 <a:solidFill>
                   <a:srgbClr val="980000"/>
                 </a:solidFill>
@@ -20786,7 +21166,7 @@
               <a:t> </a:t>
             </a:r>
             <a:r>
-              <a:rPr sz="1800" b="1" dirty="0">
+              <a:rPr sz="2000" b="1" dirty="0">
                 <a:solidFill>
                   <a:srgbClr val="980000"/>
                 </a:solidFill>
@@ -20796,7 +21176,7 @@
               <a:t>heap</a:t>
             </a:r>
             <a:r>
-              <a:rPr sz="1800" dirty="0">
+              <a:rPr sz="2000" dirty="0">
                 <a:solidFill>
                   <a:srgbClr val="980000"/>
                 </a:solidFill>
@@ -20806,7 +21186,7 @@
               <a:t>,</a:t>
             </a:r>
             <a:r>
-              <a:rPr sz="1800" spc="-20" dirty="0">
+              <a:rPr sz="2000" spc="-20" dirty="0">
                 <a:solidFill>
                   <a:srgbClr val="980000"/>
                 </a:solidFill>
@@ -20816,7 +21196,7 @@
               <a:t> </a:t>
             </a:r>
             <a:r>
-              <a:rPr sz="1800" dirty="0">
+              <a:rPr sz="2000" dirty="0">
                 <a:solidFill>
                   <a:srgbClr val="980000"/>
                 </a:solidFill>
@@ -20826,7 +21206,7 @@
               <a:t>not</a:t>
             </a:r>
             <a:r>
-              <a:rPr sz="1800" spc="-20" dirty="0">
+              <a:rPr sz="2000" spc="-20" dirty="0">
                 <a:solidFill>
                   <a:srgbClr val="980000"/>
                 </a:solidFill>
@@ -20836,7 +21216,7 @@
               <a:t> </a:t>
             </a:r>
             <a:r>
-              <a:rPr sz="1800" spc="-25" dirty="0">
+              <a:rPr sz="2000" spc="-25" dirty="0">
                 <a:solidFill>
                   <a:srgbClr val="980000"/>
                 </a:solidFill>
@@ -20846,7 +21226,7 @@
               <a:t>the </a:t>
             </a:r>
             <a:r>
-              <a:rPr sz="1800" spc="-10" dirty="0">
+              <a:rPr sz="2000" spc="-10" dirty="0">
                 <a:solidFill>
                   <a:srgbClr val="980000"/>
                 </a:solidFill>
@@ -20855,7 +21235,7 @@
               </a:rPr>
               <a:t>stack.</a:t>
             </a:r>
-            <a:endParaRPr sz="1800" dirty="0">
+            <a:endParaRPr sz="2000" dirty="0">
               <a:latin typeface="Arial MT"/>
               <a:cs typeface="Arial MT"/>
             </a:endParaRPr>
@@ -20874,7 +21254,7 @@
               </a:tabLst>
             </a:pPr>
             <a:r>
-              <a:rPr sz="1800" dirty="0">
+              <a:rPr sz="2000" dirty="0">
                 <a:solidFill>
                   <a:srgbClr val="980000"/>
                 </a:solidFill>
@@ -20884,7 +21264,7 @@
               <a:t>The</a:t>
             </a:r>
             <a:r>
-              <a:rPr sz="1800" spc="-25" dirty="0">
+              <a:rPr sz="2000" spc="-25" dirty="0">
                 <a:solidFill>
                   <a:srgbClr val="980000"/>
                 </a:solidFill>
@@ -20894,7 +21274,7 @@
               <a:t> </a:t>
             </a:r>
             <a:r>
-              <a:rPr sz="1800" dirty="0">
+              <a:rPr sz="2000" dirty="0">
                 <a:solidFill>
                   <a:srgbClr val="980000"/>
                 </a:solidFill>
@@ -20904,7 +21284,7 @@
               <a:t>size</a:t>
             </a:r>
             <a:r>
-              <a:rPr sz="1800" spc="-20" dirty="0">
+              <a:rPr sz="2000" spc="-20" dirty="0">
                 <a:solidFill>
                   <a:srgbClr val="980000"/>
                 </a:solidFill>
@@ -20914,7 +21294,7 @@
               <a:t> </a:t>
             </a:r>
             <a:r>
-              <a:rPr sz="1800" dirty="0">
+              <a:rPr sz="2000" dirty="0">
                 <a:solidFill>
                   <a:srgbClr val="980000"/>
                 </a:solidFill>
@@ -20924,7 +21304,7 @@
               <a:t>can</a:t>
             </a:r>
             <a:r>
-              <a:rPr sz="1800" spc="-25" dirty="0">
+              <a:rPr sz="2000" spc="-25" dirty="0">
                 <a:solidFill>
                   <a:srgbClr val="980000"/>
                 </a:solidFill>
@@ -20934,7 +21314,7 @@
               <a:t> </a:t>
             </a:r>
             <a:r>
-              <a:rPr sz="1800" dirty="0">
+              <a:rPr sz="2000" dirty="0">
                 <a:solidFill>
                   <a:srgbClr val="980000"/>
                 </a:solidFill>
@@ -20944,7 +21324,7 @@
               <a:t>be</a:t>
             </a:r>
             <a:r>
-              <a:rPr sz="1800" spc="-20" dirty="0">
+              <a:rPr sz="2000" spc="-20" dirty="0">
                 <a:solidFill>
                   <a:srgbClr val="980000"/>
                 </a:solidFill>
@@ -20954,7 +21334,7 @@
               <a:t> </a:t>
             </a:r>
             <a:r>
-              <a:rPr sz="1800" dirty="0">
+              <a:rPr sz="2000" dirty="0">
                 <a:solidFill>
                   <a:srgbClr val="980000"/>
                 </a:solidFill>
@@ -20964,7 +21344,7 @@
               <a:t>determined</a:t>
             </a:r>
             <a:r>
-              <a:rPr sz="1800" spc="-20" dirty="0">
+              <a:rPr sz="2000" spc="-20" dirty="0">
                 <a:solidFill>
                   <a:srgbClr val="980000"/>
                 </a:solidFill>
@@ -20974,7 +21354,7 @@
               <a:t> </a:t>
             </a:r>
             <a:r>
-              <a:rPr sz="1800" spc="-25" dirty="0">
+              <a:rPr sz="2000" spc="-25" dirty="0">
                 <a:solidFill>
                   <a:srgbClr val="980000"/>
                 </a:solidFill>
@@ -20984,7 +21364,7 @@
               <a:t>at </a:t>
             </a:r>
             <a:r>
-              <a:rPr sz="1800" dirty="0">
+              <a:rPr sz="2000" dirty="0">
                 <a:solidFill>
                   <a:srgbClr val="980000"/>
                 </a:solidFill>
@@ -20994,7 +21374,7 @@
               <a:t>runtime</a:t>
             </a:r>
             <a:r>
-              <a:rPr sz="1800" spc="-30" dirty="0">
+              <a:rPr sz="2000" spc="-30" dirty="0">
                 <a:solidFill>
                   <a:srgbClr val="980000"/>
                 </a:solidFill>
@@ -21004,7 +21384,7 @@
               <a:t> </a:t>
             </a:r>
             <a:r>
-              <a:rPr sz="1800" dirty="0">
+              <a:rPr sz="2000" dirty="0">
                 <a:solidFill>
                   <a:srgbClr val="980000"/>
                 </a:solidFill>
@@ -21014,7 +21394,7 @@
               <a:t>(e.g.,</a:t>
             </a:r>
             <a:r>
-              <a:rPr sz="1800" spc="-20" dirty="0">
+              <a:rPr sz="2000" spc="-20" dirty="0">
                 <a:solidFill>
                   <a:srgbClr val="980000"/>
                 </a:solidFill>
@@ -21024,7 +21404,7 @@
               <a:t> </a:t>
             </a:r>
             <a:r>
-              <a:rPr sz="1800" dirty="0">
+              <a:rPr sz="2000" dirty="0">
                 <a:solidFill>
                   <a:srgbClr val="980000"/>
                 </a:solidFill>
@@ -21034,7 +21414,7 @@
               <a:t>user</a:t>
             </a:r>
             <a:r>
-              <a:rPr sz="1800" spc="-20" dirty="0">
+              <a:rPr sz="2000" spc="-20" dirty="0">
                 <a:solidFill>
                   <a:srgbClr val="980000"/>
                 </a:solidFill>
@@ -21044,7 +21424,7 @@
               <a:t> </a:t>
             </a:r>
             <a:r>
-              <a:rPr sz="1800" dirty="0">
+              <a:rPr sz="2000" dirty="0">
                 <a:solidFill>
                   <a:srgbClr val="980000"/>
                 </a:solidFill>
@@ -21054,7 +21434,7 @@
               <a:t>input</a:t>
             </a:r>
             <a:r>
-              <a:rPr sz="1800" spc="-20" dirty="0">
+              <a:rPr sz="2000" spc="-20" dirty="0">
                 <a:solidFill>
                   <a:srgbClr val="980000"/>
                 </a:solidFill>
@@ -21064,7 +21444,7 @@
               <a:t> </a:t>
             </a:r>
             <a:r>
-              <a:rPr sz="1800" dirty="0">
+              <a:rPr sz="2000" dirty="0">
                 <a:solidFill>
                   <a:srgbClr val="980000"/>
                 </a:solidFill>
@@ -21074,7 +21454,7 @@
               <a:t>for</a:t>
             </a:r>
             <a:r>
-              <a:rPr sz="1800" spc="5" dirty="0">
+              <a:rPr sz="2000" spc="5" dirty="0">
                 <a:solidFill>
                   <a:srgbClr val="980000"/>
                 </a:solidFill>
@@ -21084,7 +21464,7 @@
               <a:t> </a:t>
             </a:r>
             <a:r>
-              <a:rPr sz="1800" b="1" spc="-25" dirty="0">
+              <a:rPr sz="2000" b="1" spc="-25" dirty="0">
                 <a:solidFill>
                   <a:srgbClr val="980000"/>
                 </a:solidFill>
@@ -21094,7 +21474,7 @@
               <a:t>n</a:t>
             </a:r>
             <a:r>
-              <a:rPr sz="1800" spc="-25" dirty="0">
+              <a:rPr sz="2000" spc="-25" dirty="0">
                 <a:solidFill>
                   <a:srgbClr val="980000"/>
                 </a:solidFill>
@@ -21103,7 +21483,7 @@
               </a:rPr>
               <a:t>).</a:t>
             </a:r>
-            <a:endParaRPr sz="1800" dirty="0">
+            <a:endParaRPr sz="2000" dirty="0">
               <a:latin typeface="Arial MT"/>
               <a:cs typeface="Arial MT"/>
             </a:endParaRPr>
@@ -21119,7 +21499,7 @@
               </a:tabLst>
             </a:pPr>
             <a:r>
-              <a:rPr sz="1800" spc="-35" dirty="0">
+              <a:rPr sz="2000" spc="-35" dirty="0">
                 <a:solidFill>
                   <a:srgbClr val="980000"/>
                 </a:solidFill>
@@ -21129,7 +21509,7 @@
               <a:t>You </a:t>
             </a:r>
             <a:r>
-              <a:rPr sz="1800" dirty="0">
+              <a:rPr sz="2000" dirty="0">
                 <a:solidFill>
                   <a:srgbClr val="980000"/>
                 </a:solidFill>
@@ -21139,7 +21519,7 @@
               <a:t>must</a:t>
             </a:r>
             <a:r>
-              <a:rPr sz="1800" spc="-20" dirty="0">
+              <a:rPr sz="2000" spc="-20" dirty="0">
                 <a:solidFill>
                   <a:srgbClr val="980000"/>
                 </a:solidFill>
@@ -21149,7 +21529,7 @@
               <a:t> </a:t>
             </a:r>
             <a:r>
-              <a:rPr sz="1800" dirty="0">
+              <a:rPr sz="2000" dirty="0">
                 <a:solidFill>
                   <a:srgbClr val="980000"/>
                 </a:solidFill>
@@ -21159,7 +21539,7 @@
               <a:t>manually</a:t>
             </a:r>
             <a:r>
-              <a:rPr sz="1800" spc="-10" dirty="0">
+              <a:rPr sz="2000" spc="-10" dirty="0">
                 <a:solidFill>
                   <a:srgbClr val="980000"/>
                 </a:solidFill>
@@ -21169,7 +21549,7 @@
               <a:t> </a:t>
             </a:r>
             <a:r>
-              <a:rPr sz="1800" b="1" spc="-10" dirty="0">
+              <a:rPr sz="2000" b="1" spc="-10" dirty="0">
                 <a:solidFill>
                   <a:srgbClr val="980000"/>
                 </a:solidFill>
@@ -21179,7 +21559,7 @@
               <a:t>free</a:t>
             </a:r>
             <a:r>
-              <a:rPr sz="1800" spc="-585" dirty="0">
+              <a:rPr sz="2000" spc="-585" dirty="0">
                 <a:solidFill>
                   <a:srgbClr val="980000"/>
                 </a:solidFill>
@@ -21189,7 +21569,7 @@
               <a:t> </a:t>
             </a:r>
             <a:r>
-              <a:rPr sz="1800" spc="-25" dirty="0">
+              <a:rPr sz="2000" spc="-25" dirty="0">
                 <a:solidFill>
                   <a:srgbClr val="980000"/>
                 </a:solidFill>
@@ -21199,7 +21579,7 @@
               <a:t>the </a:t>
             </a:r>
             <a:r>
-              <a:rPr sz="1800" dirty="0">
+              <a:rPr sz="2000" dirty="0">
                 <a:solidFill>
                   <a:srgbClr val="980000"/>
                 </a:solidFill>
@@ -21209,7 +21589,7 @@
               <a:t>allocated</a:t>
             </a:r>
             <a:r>
-              <a:rPr sz="1800" spc="-45" dirty="0">
+              <a:rPr sz="2000" spc="-45" dirty="0">
                 <a:solidFill>
                   <a:srgbClr val="980000"/>
                 </a:solidFill>
@@ -21219,7 +21599,7 @@
               <a:t> </a:t>
             </a:r>
             <a:r>
-              <a:rPr sz="1800" spc="-10" dirty="0">
+              <a:rPr sz="2000" spc="-10" dirty="0">
                 <a:solidFill>
                   <a:srgbClr val="980000"/>
                 </a:solidFill>
@@ -21228,7 +21608,7 @@
               </a:rPr>
               <a:t>memory.</a:t>
             </a:r>
-            <a:endParaRPr sz="1800" dirty="0">
+            <a:endParaRPr sz="2000" dirty="0">
               <a:latin typeface="Arial MT"/>
               <a:cs typeface="Arial MT"/>
             </a:endParaRPr>
@@ -22391,7 +22771,7 @@
               </a:rPr>
               <a:t> malloc_test</a:t>
             </a:r>
-            <a:endParaRPr sz="1800">
+            <a:endParaRPr sz="1800" dirty="0">
               <a:latin typeface="Arial MT"/>
               <a:cs typeface="Arial MT"/>
             </a:endParaRPr>
@@ -23160,7 +23540,7 @@
         </p:nvSpPr>
         <p:spPr>
           <a:xfrm>
-            <a:off x="410375" y="1295400"/>
+            <a:off x="410375" y="1165361"/>
             <a:ext cx="3704425" cy="406400"/>
           </a:xfrm>
           <a:prstGeom prst="rect">
@@ -23218,7 +23598,7 @@
         </p:blipFill>
         <p:spPr>
           <a:xfrm>
-            <a:off x="317674" y="1905000"/>
+            <a:off x="317674" y="1774961"/>
             <a:ext cx="4482926" cy="1169299"/>
           </a:xfrm>
           <a:prstGeom prst="rect">
@@ -23234,7 +23614,7 @@
         </p:nvSpPr>
         <p:spPr>
           <a:xfrm>
-            <a:off x="317673" y="3226699"/>
+            <a:off x="317673" y="3096660"/>
             <a:ext cx="4482926" cy="2983381"/>
           </a:xfrm>
           <a:prstGeom prst="rect">
@@ -23970,7 +24350,7 @@
         </p:blipFill>
         <p:spPr>
           <a:xfrm>
-            <a:off x="5144770" y="1044439"/>
+            <a:off x="5144770" y="914400"/>
             <a:ext cx="5672455" cy="2089874"/>
           </a:xfrm>
           <a:prstGeom prst="rect">
@@ -23986,7 +24366,7 @@
         </p:nvSpPr>
         <p:spPr>
           <a:xfrm>
-            <a:off x="5144770" y="3200400"/>
+            <a:off x="5144770" y="3070361"/>
             <a:ext cx="6513830" cy="3598934"/>
           </a:xfrm>
           <a:prstGeom prst="rect">
@@ -24090,7 +24470,7 @@
                 <a:spcPts val="910"/>
               </a:spcBef>
               <a:spcAft>
-                <a:spcPts val="600"/>
+                <a:spcPts val="300"/>
               </a:spcAft>
               <a:buChar char="●"/>
               <a:tabLst>
